--- a/deep_learning/misc-Exclusive-Use-Case-Of-ANN.pptx
+++ b/deep_learning/misc-Exclusive-Use-Case-Of-ANN.pptx
@@ -164,10 +164,9 @@
           </a:lstStyle>
           <a:p>
             <a:r>
-              <a:rPr lang="en-US" smtClean="0"/>
+              <a:rPr lang="en-US"/>
               <a:t>Click to edit Master title style</a:t>
             </a:r>
-            <a:endParaRPr lang="en-US"/>
           </a:p>
         </p:txBody>
       </p:sp>
@@ -229,10 +228,9 @@
           </a:lstStyle>
           <a:p>
             <a:r>
-              <a:rPr lang="en-US" smtClean="0"/>
+              <a:rPr lang="en-US"/>
               <a:t>Click to edit Master subtitle style</a:t>
             </a:r>
-            <a:endParaRPr lang="en-US"/>
           </a:p>
         </p:txBody>
       </p:sp>
@@ -253,7 +251,7 @@
           <a:p>
             <a:fld id="{FF3B6DEB-7E03-47F7-BBBD-F0637F5F6F93}" type="datetimeFigureOut">
               <a:rPr lang="en-US" smtClean="0"/>
-              <a:t>3/23/2025</a:t>
+              <a:t>4/3/2026</a:t>
             </a:fld>
             <a:endParaRPr lang="en-US"/>
           </a:p>
@@ -347,10 +345,9 @@
           <a:lstStyle/>
           <a:p>
             <a:r>
-              <a:rPr lang="en-US" smtClean="0"/>
+              <a:rPr lang="en-US"/>
               <a:t>Click to edit Master title style</a:t>
             </a:r>
-            <a:endParaRPr lang="en-US"/>
           </a:p>
         </p:txBody>
       </p:sp>
@@ -371,38 +368,37 @@
           <a:p>
             <a:pPr lvl="0"/>
             <a:r>
-              <a:rPr lang="en-US" smtClean="0"/>
+              <a:rPr lang="en-US"/>
               <a:t>Edit Master text styles</a:t>
             </a:r>
           </a:p>
           <a:p>
             <a:pPr lvl="1"/>
             <a:r>
-              <a:rPr lang="en-US" smtClean="0"/>
+              <a:rPr lang="en-US"/>
               <a:t>Second level</a:t>
             </a:r>
           </a:p>
           <a:p>
             <a:pPr lvl="2"/>
             <a:r>
-              <a:rPr lang="en-US" smtClean="0"/>
+              <a:rPr lang="en-US"/>
               <a:t>Third level</a:t>
             </a:r>
           </a:p>
           <a:p>
             <a:pPr lvl="3"/>
             <a:r>
-              <a:rPr lang="en-US" smtClean="0"/>
+              <a:rPr lang="en-US"/>
               <a:t>Fourth level</a:t>
             </a:r>
           </a:p>
           <a:p>
             <a:pPr lvl="4"/>
             <a:r>
-              <a:rPr lang="en-US" smtClean="0"/>
+              <a:rPr lang="en-US"/>
               <a:t>Fifth level</a:t>
             </a:r>
-            <a:endParaRPr lang="en-US"/>
           </a:p>
         </p:txBody>
       </p:sp>
@@ -423,7 +419,7 @@
           <a:p>
             <a:fld id="{FF3B6DEB-7E03-47F7-BBBD-F0637F5F6F93}" type="datetimeFigureOut">
               <a:rPr lang="en-US" smtClean="0"/>
-              <a:t>3/23/2025</a:t>
+              <a:t>4/3/2026</a:t>
             </a:fld>
             <a:endParaRPr lang="en-US"/>
           </a:p>
@@ -522,10 +518,9 @@
           <a:lstStyle/>
           <a:p>
             <a:r>
-              <a:rPr lang="en-US" smtClean="0"/>
+              <a:rPr lang="en-US"/>
               <a:t>Click to edit Master title style</a:t>
             </a:r>
-            <a:endParaRPr lang="en-US"/>
           </a:p>
         </p:txBody>
       </p:sp>
@@ -551,38 +546,37 @@
           <a:p>
             <a:pPr lvl="0"/>
             <a:r>
-              <a:rPr lang="en-US" smtClean="0"/>
+              <a:rPr lang="en-US"/>
               <a:t>Edit Master text styles</a:t>
             </a:r>
           </a:p>
           <a:p>
             <a:pPr lvl="1"/>
             <a:r>
-              <a:rPr lang="en-US" smtClean="0"/>
+              <a:rPr lang="en-US"/>
               <a:t>Second level</a:t>
             </a:r>
           </a:p>
           <a:p>
             <a:pPr lvl="2"/>
             <a:r>
-              <a:rPr lang="en-US" smtClean="0"/>
+              <a:rPr lang="en-US"/>
               <a:t>Third level</a:t>
             </a:r>
           </a:p>
           <a:p>
             <a:pPr lvl="3"/>
             <a:r>
-              <a:rPr lang="en-US" smtClean="0"/>
+              <a:rPr lang="en-US"/>
               <a:t>Fourth level</a:t>
             </a:r>
           </a:p>
           <a:p>
             <a:pPr lvl="4"/>
             <a:r>
-              <a:rPr lang="en-US" smtClean="0"/>
+              <a:rPr lang="en-US"/>
               <a:t>Fifth level</a:t>
             </a:r>
-            <a:endParaRPr lang="en-US"/>
           </a:p>
         </p:txBody>
       </p:sp>
@@ -603,7 +597,7 @@
           <a:p>
             <a:fld id="{FF3B6DEB-7E03-47F7-BBBD-F0637F5F6F93}" type="datetimeFigureOut">
               <a:rPr lang="en-US" smtClean="0"/>
-              <a:t>3/23/2025</a:t>
+              <a:t>4/3/2026</a:t>
             </a:fld>
             <a:endParaRPr lang="en-US"/>
           </a:p>
@@ -697,10 +691,9 @@
           <a:lstStyle/>
           <a:p>
             <a:r>
-              <a:rPr lang="en-US" smtClean="0"/>
+              <a:rPr lang="en-US"/>
               <a:t>Click to edit Master title style</a:t>
             </a:r>
-            <a:endParaRPr lang="en-US"/>
           </a:p>
         </p:txBody>
       </p:sp>
@@ -721,38 +714,37 @@
           <a:p>
             <a:pPr lvl="0"/>
             <a:r>
-              <a:rPr lang="en-US" smtClean="0"/>
+              <a:rPr lang="en-US"/>
               <a:t>Edit Master text styles</a:t>
             </a:r>
           </a:p>
           <a:p>
             <a:pPr lvl="1"/>
             <a:r>
-              <a:rPr lang="en-US" smtClean="0"/>
+              <a:rPr lang="en-US"/>
               <a:t>Second level</a:t>
             </a:r>
           </a:p>
           <a:p>
             <a:pPr lvl="2"/>
             <a:r>
-              <a:rPr lang="en-US" smtClean="0"/>
+              <a:rPr lang="en-US"/>
               <a:t>Third level</a:t>
             </a:r>
           </a:p>
           <a:p>
             <a:pPr lvl="3"/>
             <a:r>
-              <a:rPr lang="en-US" smtClean="0"/>
+              <a:rPr lang="en-US"/>
               <a:t>Fourth level</a:t>
             </a:r>
           </a:p>
           <a:p>
             <a:pPr lvl="4"/>
             <a:r>
-              <a:rPr lang="en-US" smtClean="0"/>
+              <a:rPr lang="en-US"/>
               <a:t>Fifth level</a:t>
             </a:r>
-            <a:endParaRPr lang="en-US"/>
           </a:p>
         </p:txBody>
       </p:sp>
@@ -773,7 +765,7 @@
           <a:p>
             <a:fld id="{FF3B6DEB-7E03-47F7-BBBD-F0637F5F6F93}" type="datetimeFigureOut">
               <a:rPr lang="en-US" smtClean="0"/>
-              <a:t>3/23/2025</a:t>
+              <a:t>4/3/2026</a:t>
             </a:fld>
             <a:endParaRPr lang="en-US"/>
           </a:p>
@@ -876,10 +868,9 @@
           </a:lstStyle>
           <a:p>
             <a:r>
-              <a:rPr lang="en-US" smtClean="0"/>
+              <a:rPr lang="en-US"/>
               <a:t>Click to edit Master title style</a:t>
             </a:r>
-            <a:endParaRPr lang="en-US"/>
           </a:p>
         </p:txBody>
       </p:sp>
@@ -996,7 +987,7 @@
           <a:p>
             <a:pPr lvl="0"/>
             <a:r>
-              <a:rPr lang="en-US" smtClean="0"/>
+              <a:rPr lang="en-US"/>
               <a:t>Edit Master text styles</a:t>
             </a:r>
           </a:p>
@@ -1019,7 +1010,7 @@
           <a:p>
             <a:fld id="{FF3B6DEB-7E03-47F7-BBBD-F0637F5F6F93}" type="datetimeFigureOut">
               <a:rPr lang="en-US" smtClean="0"/>
-              <a:t>3/23/2025</a:t>
+              <a:t>4/3/2026</a:t>
             </a:fld>
             <a:endParaRPr lang="en-US"/>
           </a:p>
@@ -1113,10 +1104,9 @@
           <a:lstStyle/>
           <a:p>
             <a:r>
-              <a:rPr lang="en-US" smtClean="0"/>
+              <a:rPr lang="en-US"/>
               <a:t>Click to edit Master title style</a:t>
             </a:r>
-            <a:endParaRPr lang="en-US"/>
           </a:p>
         </p:txBody>
       </p:sp>
@@ -1142,38 +1132,37 @@
           <a:p>
             <a:pPr lvl="0"/>
             <a:r>
-              <a:rPr lang="en-US" smtClean="0"/>
+              <a:rPr lang="en-US"/>
               <a:t>Edit Master text styles</a:t>
             </a:r>
           </a:p>
           <a:p>
             <a:pPr lvl="1"/>
             <a:r>
-              <a:rPr lang="en-US" smtClean="0"/>
+              <a:rPr lang="en-US"/>
               <a:t>Second level</a:t>
             </a:r>
           </a:p>
           <a:p>
             <a:pPr lvl="2"/>
             <a:r>
-              <a:rPr lang="en-US" smtClean="0"/>
+              <a:rPr lang="en-US"/>
               <a:t>Third level</a:t>
             </a:r>
           </a:p>
           <a:p>
             <a:pPr lvl="3"/>
             <a:r>
-              <a:rPr lang="en-US" smtClean="0"/>
+              <a:rPr lang="en-US"/>
               <a:t>Fourth level</a:t>
             </a:r>
           </a:p>
           <a:p>
             <a:pPr lvl="4"/>
             <a:r>
-              <a:rPr lang="en-US" smtClean="0"/>
+              <a:rPr lang="en-US"/>
               <a:t>Fifth level</a:t>
             </a:r>
-            <a:endParaRPr lang="en-US"/>
           </a:p>
         </p:txBody>
       </p:sp>
@@ -1199,38 +1188,37 @@
           <a:p>
             <a:pPr lvl="0"/>
             <a:r>
-              <a:rPr lang="en-US" smtClean="0"/>
+              <a:rPr lang="en-US"/>
               <a:t>Edit Master text styles</a:t>
             </a:r>
           </a:p>
           <a:p>
             <a:pPr lvl="1"/>
             <a:r>
-              <a:rPr lang="en-US" smtClean="0"/>
+              <a:rPr lang="en-US"/>
               <a:t>Second level</a:t>
             </a:r>
           </a:p>
           <a:p>
             <a:pPr lvl="2"/>
             <a:r>
-              <a:rPr lang="en-US" smtClean="0"/>
+              <a:rPr lang="en-US"/>
               <a:t>Third level</a:t>
             </a:r>
           </a:p>
           <a:p>
             <a:pPr lvl="3"/>
             <a:r>
-              <a:rPr lang="en-US" smtClean="0"/>
+              <a:rPr lang="en-US"/>
               <a:t>Fourth level</a:t>
             </a:r>
           </a:p>
           <a:p>
             <a:pPr lvl="4"/>
             <a:r>
-              <a:rPr lang="en-US" smtClean="0"/>
+              <a:rPr lang="en-US"/>
               <a:t>Fifth level</a:t>
             </a:r>
-            <a:endParaRPr lang="en-US"/>
           </a:p>
         </p:txBody>
       </p:sp>
@@ -1251,7 +1239,7 @@
           <a:p>
             <a:fld id="{FF3B6DEB-7E03-47F7-BBBD-F0637F5F6F93}" type="datetimeFigureOut">
               <a:rPr lang="en-US" smtClean="0"/>
-              <a:t>3/23/2025</a:t>
+              <a:t>4/3/2026</a:t>
             </a:fld>
             <a:endParaRPr lang="en-US"/>
           </a:p>
@@ -1350,10 +1338,9 @@
           <a:lstStyle/>
           <a:p>
             <a:r>
-              <a:rPr lang="en-US" smtClean="0"/>
+              <a:rPr lang="en-US"/>
               <a:t>Click to edit Master title style</a:t>
             </a:r>
-            <a:endParaRPr lang="en-US"/>
           </a:p>
         </p:txBody>
       </p:sp>
@@ -1416,7 +1403,7 @@
           <a:p>
             <a:pPr lvl="0"/>
             <a:r>
-              <a:rPr lang="en-US" smtClean="0"/>
+              <a:rPr lang="en-US"/>
               <a:t>Edit Master text styles</a:t>
             </a:r>
           </a:p>
@@ -1444,38 +1431,37 @@
           <a:p>
             <a:pPr lvl="0"/>
             <a:r>
-              <a:rPr lang="en-US" smtClean="0"/>
+              <a:rPr lang="en-US"/>
               <a:t>Edit Master text styles</a:t>
             </a:r>
           </a:p>
           <a:p>
             <a:pPr lvl="1"/>
             <a:r>
-              <a:rPr lang="en-US" smtClean="0"/>
+              <a:rPr lang="en-US"/>
               <a:t>Second level</a:t>
             </a:r>
           </a:p>
           <a:p>
             <a:pPr lvl="2"/>
             <a:r>
-              <a:rPr lang="en-US" smtClean="0"/>
+              <a:rPr lang="en-US"/>
               <a:t>Third level</a:t>
             </a:r>
           </a:p>
           <a:p>
             <a:pPr lvl="3"/>
             <a:r>
-              <a:rPr lang="en-US" smtClean="0"/>
+              <a:rPr lang="en-US"/>
               <a:t>Fourth level</a:t>
             </a:r>
           </a:p>
           <a:p>
             <a:pPr lvl="4"/>
             <a:r>
-              <a:rPr lang="en-US" smtClean="0"/>
+              <a:rPr lang="en-US"/>
               <a:t>Fifth level</a:t>
             </a:r>
-            <a:endParaRPr lang="en-US"/>
           </a:p>
         </p:txBody>
       </p:sp>
@@ -1538,7 +1524,7 @@
           <a:p>
             <a:pPr lvl="0"/>
             <a:r>
-              <a:rPr lang="en-US" smtClean="0"/>
+              <a:rPr lang="en-US"/>
               <a:t>Edit Master text styles</a:t>
             </a:r>
           </a:p>
@@ -1566,38 +1552,37 @@
           <a:p>
             <a:pPr lvl="0"/>
             <a:r>
-              <a:rPr lang="en-US" smtClean="0"/>
+              <a:rPr lang="en-US"/>
               <a:t>Edit Master text styles</a:t>
             </a:r>
           </a:p>
           <a:p>
             <a:pPr lvl="1"/>
             <a:r>
-              <a:rPr lang="en-US" smtClean="0"/>
+              <a:rPr lang="en-US"/>
               <a:t>Second level</a:t>
             </a:r>
           </a:p>
           <a:p>
             <a:pPr lvl="2"/>
             <a:r>
-              <a:rPr lang="en-US" smtClean="0"/>
+              <a:rPr lang="en-US"/>
               <a:t>Third level</a:t>
             </a:r>
           </a:p>
           <a:p>
             <a:pPr lvl="3"/>
             <a:r>
-              <a:rPr lang="en-US" smtClean="0"/>
+              <a:rPr lang="en-US"/>
               <a:t>Fourth level</a:t>
             </a:r>
           </a:p>
           <a:p>
             <a:pPr lvl="4"/>
             <a:r>
-              <a:rPr lang="en-US" smtClean="0"/>
+              <a:rPr lang="en-US"/>
               <a:t>Fifth level</a:t>
             </a:r>
-            <a:endParaRPr lang="en-US"/>
           </a:p>
         </p:txBody>
       </p:sp>
@@ -1618,7 +1603,7 @@
           <a:p>
             <a:fld id="{FF3B6DEB-7E03-47F7-BBBD-F0637F5F6F93}" type="datetimeFigureOut">
               <a:rPr lang="en-US" smtClean="0"/>
-              <a:t>3/23/2025</a:t>
+              <a:t>4/3/2026</a:t>
             </a:fld>
             <a:endParaRPr lang="en-US"/>
           </a:p>
@@ -1712,10 +1697,9 @@
           <a:lstStyle/>
           <a:p>
             <a:r>
-              <a:rPr lang="en-US" smtClean="0"/>
+              <a:rPr lang="en-US"/>
               <a:t>Click to edit Master title style</a:t>
             </a:r>
-            <a:endParaRPr lang="en-US"/>
           </a:p>
         </p:txBody>
       </p:sp>
@@ -1736,7 +1720,7 @@
           <a:p>
             <a:fld id="{FF3B6DEB-7E03-47F7-BBBD-F0637F5F6F93}" type="datetimeFigureOut">
               <a:rPr lang="en-US" smtClean="0"/>
-              <a:t>3/23/2025</a:t>
+              <a:t>4/3/2026</a:t>
             </a:fld>
             <a:endParaRPr lang="en-US"/>
           </a:p>
@@ -1831,7 +1815,7 @@
           <a:p>
             <a:fld id="{FF3B6DEB-7E03-47F7-BBBD-F0637F5F6F93}" type="datetimeFigureOut">
               <a:rPr lang="en-US" smtClean="0"/>
-              <a:t>3/23/2025</a:t>
+              <a:t>4/3/2026</a:t>
             </a:fld>
             <a:endParaRPr lang="en-US"/>
           </a:p>
@@ -1934,10 +1918,9 @@
           </a:lstStyle>
           <a:p>
             <a:r>
-              <a:rPr lang="en-US" smtClean="0"/>
+              <a:rPr lang="en-US"/>
               <a:t>Click to edit Master title style</a:t>
             </a:r>
-            <a:endParaRPr lang="en-US"/>
           </a:p>
         </p:txBody>
       </p:sp>
@@ -1991,38 +1974,37 @@
           <a:p>
             <a:pPr lvl="0"/>
             <a:r>
-              <a:rPr lang="en-US" smtClean="0"/>
+              <a:rPr lang="en-US"/>
               <a:t>Edit Master text styles</a:t>
             </a:r>
           </a:p>
           <a:p>
             <a:pPr lvl="1"/>
             <a:r>
-              <a:rPr lang="en-US" smtClean="0"/>
+              <a:rPr lang="en-US"/>
               <a:t>Second level</a:t>
             </a:r>
           </a:p>
           <a:p>
             <a:pPr lvl="2"/>
             <a:r>
-              <a:rPr lang="en-US" smtClean="0"/>
+              <a:rPr lang="en-US"/>
               <a:t>Third level</a:t>
             </a:r>
           </a:p>
           <a:p>
             <a:pPr lvl="3"/>
             <a:r>
-              <a:rPr lang="en-US" smtClean="0"/>
+              <a:rPr lang="en-US"/>
               <a:t>Fourth level</a:t>
             </a:r>
           </a:p>
           <a:p>
             <a:pPr lvl="4"/>
             <a:r>
-              <a:rPr lang="en-US" smtClean="0"/>
+              <a:rPr lang="en-US"/>
               <a:t>Fifth level</a:t>
             </a:r>
-            <a:endParaRPr lang="en-US"/>
           </a:p>
         </p:txBody>
       </p:sp>
@@ -2085,7 +2067,7 @@
           <a:p>
             <a:pPr lvl="0"/>
             <a:r>
-              <a:rPr lang="en-US" smtClean="0"/>
+              <a:rPr lang="en-US"/>
               <a:t>Edit Master text styles</a:t>
             </a:r>
           </a:p>
@@ -2108,7 +2090,7 @@
           <a:p>
             <a:fld id="{FF3B6DEB-7E03-47F7-BBBD-F0637F5F6F93}" type="datetimeFigureOut">
               <a:rPr lang="en-US" smtClean="0"/>
-              <a:t>3/23/2025</a:t>
+              <a:t>4/3/2026</a:t>
             </a:fld>
             <a:endParaRPr lang="en-US"/>
           </a:p>
@@ -2211,10 +2193,9 @@
           </a:lstStyle>
           <a:p>
             <a:r>
-              <a:rPr lang="en-US" smtClean="0"/>
+              <a:rPr lang="en-US"/>
               <a:t>Click to edit Master title style</a:t>
             </a:r>
-            <a:endParaRPr lang="en-US"/>
           </a:p>
         </p:txBody>
       </p:sp>
@@ -2338,7 +2319,7 @@
           <a:p>
             <a:pPr lvl="0"/>
             <a:r>
-              <a:rPr lang="en-US" smtClean="0"/>
+              <a:rPr lang="en-US"/>
               <a:t>Edit Master text styles</a:t>
             </a:r>
           </a:p>
@@ -2361,7 +2342,7 @@
           <a:p>
             <a:fld id="{FF3B6DEB-7E03-47F7-BBBD-F0637F5F6F93}" type="datetimeFigureOut">
               <a:rPr lang="en-US" smtClean="0"/>
-              <a:t>3/23/2025</a:t>
+              <a:t>4/3/2026</a:t>
             </a:fld>
             <a:endParaRPr lang="en-US"/>
           </a:p>
@@ -2470,10 +2451,9 @@
           <a:lstStyle/>
           <a:p>
             <a:r>
-              <a:rPr lang="en-US" smtClean="0"/>
+              <a:rPr lang="en-US"/>
               <a:t>Click to edit Master title style</a:t>
             </a:r>
-            <a:endParaRPr lang="en-US"/>
           </a:p>
         </p:txBody>
       </p:sp>
@@ -2504,38 +2484,37 @@
           <a:p>
             <a:pPr lvl="0"/>
             <a:r>
-              <a:rPr lang="en-US" smtClean="0"/>
+              <a:rPr lang="en-US"/>
               <a:t>Edit Master text styles</a:t>
             </a:r>
           </a:p>
           <a:p>
             <a:pPr lvl="1"/>
             <a:r>
-              <a:rPr lang="en-US" smtClean="0"/>
+              <a:rPr lang="en-US"/>
               <a:t>Second level</a:t>
             </a:r>
           </a:p>
           <a:p>
             <a:pPr lvl="2"/>
             <a:r>
-              <a:rPr lang="en-US" smtClean="0"/>
+              <a:rPr lang="en-US"/>
               <a:t>Third level</a:t>
             </a:r>
           </a:p>
           <a:p>
             <a:pPr lvl="3"/>
             <a:r>
-              <a:rPr lang="en-US" smtClean="0"/>
+              <a:rPr lang="en-US"/>
               <a:t>Fourth level</a:t>
             </a:r>
           </a:p>
           <a:p>
             <a:pPr lvl="4"/>
             <a:r>
-              <a:rPr lang="en-US" smtClean="0"/>
+              <a:rPr lang="en-US"/>
               <a:t>Fifth level</a:t>
             </a:r>
-            <a:endParaRPr lang="en-US"/>
           </a:p>
         </p:txBody>
       </p:sp>
@@ -2574,7 +2553,7 @@
           <a:p>
             <a:fld id="{FF3B6DEB-7E03-47F7-BBBD-F0637F5F6F93}" type="datetimeFigureOut">
               <a:rPr lang="en-US" smtClean="0"/>
-              <a:t>3/23/2025</a:t>
+              <a:t>4/3/2026</a:t>
             </a:fld>
             <a:endParaRPr lang="en-US"/>
           </a:p>
@@ -2995,10 +2974,9 @@
           <a:lstStyle/>
           <a:p>
             <a:r>
-              <a:rPr lang="en-US" dirty="0" smtClean="0"/>
+              <a:rPr lang="en-US" dirty="0"/>
               <a:t>AI ANN Applications</a:t>
             </a:r>
-            <a:endParaRPr lang="en-US" dirty="0"/>
           </a:p>
         </p:txBody>
       </p:sp>
@@ -3067,46 +3045,45 @@
           <a:lstStyle/>
           <a:p>
             <a:r>
-              <a:rPr lang="en-US" dirty="0" smtClean="0"/>
+              <a:rPr lang="en-US" dirty="0"/>
               <a:t>8. Complex Function Approximation</a:t>
             </a:r>
+          </a:p>
+        </p:txBody>
+      </p:sp>
+      <p:sp>
+        <p:nvSpPr>
+          <p:cNvPr id="3" name="Content Placeholder 2"/>
+          <p:cNvSpPr>
+            <a:spLocks noGrp="1"/>
+          </p:cNvSpPr>
+          <p:nvPr>
+            <p:ph idx="1"/>
+          </p:nvPr>
+        </p:nvSpPr>
+        <p:spPr/>
+        <p:txBody>
+          <a:bodyPr/>
+          <a:lstStyle/>
+          <a:p>
+            <a:r>
+              <a:rPr lang="en-US" dirty="0"/>
+              <a:t>When relationships between inputs and outputs are non-linear and hard to model with traditional equations.</a:t>
+            </a:r>
+          </a:p>
+          <a:p>
             <a:endParaRPr lang="en-US" dirty="0"/>
           </a:p>
-        </p:txBody>
-      </p:sp>
-      <p:sp>
-        <p:nvSpPr>
-          <p:cNvPr id="3" name="Content Placeholder 2"/>
-          <p:cNvSpPr>
-            <a:spLocks noGrp="1"/>
-          </p:cNvSpPr>
-          <p:nvPr>
-            <p:ph idx="1"/>
-          </p:nvPr>
-        </p:nvSpPr>
-        <p:spPr/>
-        <p:txBody>
-          <a:bodyPr/>
-          <a:lstStyle/>
-          <a:p>
-            <a:r>
-              <a:rPr lang="en-US" dirty="0" smtClean="0"/>
-              <a:t>When relationships between inputs and outputs are non-linear and hard to model with traditional equations.</a:t>
-            </a:r>
-          </a:p>
-          <a:p>
-            <a:endParaRPr lang="en-US" dirty="0" smtClean="0"/>
-          </a:p>
-          <a:p>
-            <a:r>
-              <a:rPr lang="en-US" dirty="0" smtClean="0"/>
+          <a:p>
+            <a:r>
+              <a:rPr lang="en-US" dirty="0"/>
               <a:t>Used in physics simulations, economic modeling, and engineering design. </a:t>
             </a:r>
             <a:r>
-              <a:rPr lang="en-US" smtClean="0"/>
+              <a:rPr lang="en-US"/>
               <a:t>– Hard nonlinear relationships require deep learning</a:t>
             </a:r>
-            <a:endParaRPr lang="en-US" dirty="0" smtClean="0"/>
+            <a:endParaRPr lang="en-US" dirty="0"/>
           </a:p>
           <a:p>
             <a:pPr marL="0" indent="0">
@@ -3165,10 +3142,9 @@
               <a:buNone/>
             </a:pPr>
             <a:r>
-              <a:rPr lang="en-US" dirty="0" smtClean="0"/>
+              <a:rPr lang="en-US" dirty="0"/>
               <a:t>In general, ANNs shine when there is large-scale data, the problem is non-linear, and traditional rule-based methods are ineffective. </a:t>
             </a:r>
-            <a:endParaRPr lang="en-US" dirty="0"/>
           </a:p>
         </p:txBody>
       </p:sp>
@@ -3204,25 +3180,6 @@
       </p:grpSpPr>
       <p:sp>
         <p:nvSpPr>
-          <p:cNvPr id="2" name="Title 1"/>
-          <p:cNvSpPr>
-            <a:spLocks noGrp="1"/>
-          </p:cNvSpPr>
-          <p:nvPr>
-            <p:ph type="title"/>
-          </p:nvPr>
-        </p:nvSpPr>
-        <p:spPr/>
-        <p:txBody>
-          <a:bodyPr/>
-          <a:lstStyle/>
-          <a:p>
-            <a:endParaRPr lang="en-US"/>
-          </a:p>
-        </p:txBody>
-      </p:sp>
-      <p:sp>
-        <p:nvSpPr>
           <p:cNvPr id="3" name="Content Placeholder 2"/>
           <p:cNvSpPr>
             <a:spLocks noGrp="1"/>
@@ -3240,7 +3197,7 @@
               <a:buNone/>
             </a:pPr>
             <a:r>
-              <a:rPr lang="en-US" dirty="0" smtClean="0"/>
+              <a:rPr lang="en-US" dirty="0"/>
               <a:t>Artificial Neural Networks (ANNs) are ideally suited for problems where traditional algorithms struggle due to complexity, non-linearity, and large amounts of data. </a:t>
             </a:r>
           </a:p>
@@ -3249,26 +3206,25 @@
               <a:buNone/>
             </a:pPr>
             <a:r>
-              <a:rPr lang="en-US" dirty="0" smtClean="0"/>
+              <a:rPr lang="en-US" dirty="0"/>
               <a:t>Here are the applications that are </a:t>
             </a:r>
             <a:r>
-              <a:rPr lang="en-US" b="1" dirty="0" smtClean="0"/>
+              <a:rPr lang="en-US" b="1" dirty="0"/>
               <a:t>exclusively solved by ANNs</a:t>
             </a:r>
             <a:r>
-              <a:rPr lang="en-US" dirty="0" smtClean="0"/>
+              <a:rPr lang="en-US" dirty="0"/>
               <a:t>, meaning traditional machine learning methods (decision trees, SVMs, </a:t>
             </a:r>
             <a:r>
-              <a:rPr lang="en-US" dirty="0" err="1" smtClean="0"/>
+              <a:rPr lang="en-US" dirty="0" err="1"/>
               <a:t>XGBoost</a:t>
             </a:r>
             <a:r>
-              <a:rPr lang="en-US" dirty="0" smtClean="0"/>
+              <a:rPr lang="en-US" dirty="0"/>
               <a:t>, etc.) either fail or require extensive manual feature engineering:</a:t>
             </a:r>
-            <a:endParaRPr lang="en-US" dirty="0"/>
           </a:p>
         </p:txBody>
       </p:sp>
@@ -3318,48 +3274,47 @@
           <a:lstStyle/>
           <a:p>
             <a:r>
-              <a:rPr lang="en-US" dirty="0" smtClean="0"/>
+              <a:rPr lang="en-US" dirty="0"/>
               <a:t>1. Pattern Recognition &amp; Classification</a:t>
             </a:r>
+          </a:p>
+        </p:txBody>
+      </p:sp>
+      <p:sp>
+        <p:nvSpPr>
+          <p:cNvPr id="3" name="Content Placeholder 2"/>
+          <p:cNvSpPr>
+            <a:spLocks noGrp="1"/>
+          </p:cNvSpPr>
+          <p:nvPr>
+            <p:ph idx="1"/>
+          </p:nvPr>
+        </p:nvSpPr>
+        <p:spPr/>
+        <p:txBody>
+          <a:bodyPr/>
+          <a:lstStyle/>
+          <a:p>
+            <a:r>
+              <a:rPr lang="en-US" dirty="0"/>
+              <a:t>Image recognition (e.g., face detection, medical image analysis) – Uses CNNs</a:t>
+            </a:r>
+          </a:p>
+          <a:p>
             <a:endParaRPr lang="en-US" dirty="0"/>
           </a:p>
-        </p:txBody>
-      </p:sp>
-      <p:sp>
-        <p:nvSpPr>
-          <p:cNvPr id="3" name="Content Placeholder 2"/>
-          <p:cNvSpPr>
-            <a:spLocks noGrp="1"/>
-          </p:cNvSpPr>
-          <p:nvPr>
-            <p:ph idx="1"/>
-          </p:nvPr>
-        </p:nvSpPr>
-        <p:spPr/>
-        <p:txBody>
-          <a:bodyPr/>
-          <a:lstStyle/>
-          <a:p>
-            <a:r>
-              <a:rPr lang="en-US" dirty="0" smtClean="0"/>
-              <a:t>Image recognition (e.g., face detection, medical image analysis) – Uses CNNs</a:t>
-            </a:r>
-          </a:p>
-          <a:p>
-            <a:endParaRPr lang="en-US" dirty="0" smtClean="0"/>
-          </a:p>
-          <a:p>
-            <a:r>
-              <a:rPr lang="en-US" dirty="0" smtClean="0"/>
+          <a:p>
+            <a:r>
+              <a:rPr lang="en-US" dirty="0"/>
               <a:t>Speech recognition (e.g., voice assistants like Siri, Alexa) – Uses RNNs, LSTMs, Transformers</a:t>
             </a:r>
           </a:p>
           <a:p>
-            <a:endParaRPr lang="en-US" dirty="0" smtClean="0"/>
-          </a:p>
-          <a:p>
-            <a:r>
-              <a:rPr lang="en-US" dirty="0" smtClean="0"/>
+            <a:endParaRPr lang="en-US" dirty="0"/>
+          </a:p>
+          <a:p>
+            <a:r>
+              <a:rPr lang="en-US" dirty="0"/>
               <a:t>Handwriting recognition (e.g., digit recognition in postal services) – Uses CNNs</a:t>
             </a:r>
           </a:p>
@@ -3417,39 +3372,38 @@
           <a:lstStyle/>
           <a:p>
             <a:r>
-              <a:rPr lang="en-US" dirty="0" smtClean="0"/>
+              <a:rPr lang="en-US" dirty="0"/>
               <a:t>2. Natural Language Processing (NLP)</a:t>
             </a:r>
+          </a:p>
+        </p:txBody>
+      </p:sp>
+      <p:sp>
+        <p:nvSpPr>
+          <p:cNvPr id="3" name="Content Placeholder 2"/>
+          <p:cNvSpPr>
+            <a:spLocks noGrp="1"/>
+          </p:cNvSpPr>
+          <p:nvPr>
+            <p:ph idx="1"/>
+          </p:nvPr>
+        </p:nvSpPr>
+        <p:spPr/>
+        <p:txBody>
+          <a:bodyPr/>
+          <a:lstStyle/>
+          <a:p>
             <a:endParaRPr lang="en-US" dirty="0"/>
           </a:p>
-        </p:txBody>
-      </p:sp>
-      <p:sp>
-        <p:nvSpPr>
-          <p:cNvPr id="3" name="Content Placeholder 2"/>
-          <p:cNvSpPr>
-            <a:spLocks noGrp="1"/>
-          </p:cNvSpPr>
-          <p:nvPr>
-            <p:ph idx="1"/>
-          </p:nvPr>
-        </p:nvSpPr>
-        <p:spPr/>
-        <p:txBody>
-          <a:bodyPr/>
-          <a:lstStyle/>
-          <a:p>
-            <a:endParaRPr lang="en-US" dirty="0" smtClean="0"/>
-          </a:p>
-          <a:p>
-            <a:r>
-              <a:rPr lang="en-US" dirty="0" smtClean="0"/>
+          <a:p>
+            <a:r>
+              <a:rPr lang="en-US" dirty="0"/>
               <a:t>Machine translation (e.g., Google Translate) – Uses Transformers (BERT, GPT)</a:t>
             </a:r>
           </a:p>
           <a:p>
             <a:r>
-              <a:rPr lang="en-US" dirty="0" smtClean="0"/>
+              <a:rPr lang="en-US" dirty="0"/>
               <a:t>Text summarization and question answering– Uses Transformers (BERT, T5)</a:t>
             </a:r>
           </a:p>
@@ -3501,49 +3455,48 @@
           <a:lstStyle/>
           <a:p>
             <a:r>
-              <a:rPr lang="en-US" dirty="0" smtClean="0"/>
+              <a:rPr lang="en-US" dirty="0"/>
               <a:t>3. Time Series Forecasting</a:t>
             </a:r>
+          </a:p>
+        </p:txBody>
+      </p:sp>
+      <p:sp>
+        <p:nvSpPr>
+          <p:cNvPr id="3" name="Content Placeholder 2"/>
+          <p:cNvSpPr>
+            <a:spLocks noGrp="1"/>
+          </p:cNvSpPr>
+          <p:nvPr>
+            <p:ph idx="1"/>
+          </p:nvPr>
+        </p:nvSpPr>
+        <p:spPr/>
+        <p:txBody>
+          <a:bodyPr/>
+          <a:lstStyle/>
+          <a:p>
             <a:endParaRPr lang="en-US" dirty="0"/>
           </a:p>
-        </p:txBody>
-      </p:sp>
-      <p:sp>
-        <p:nvSpPr>
-          <p:cNvPr id="3" name="Content Placeholder 2"/>
-          <p:cNvSpPr>
-            <a:spLocks noGrp="1"/>
-          </p:cNvSpPr>
-          <p:nvPr>
-            <p:ph idx="1"/>
-          </p:nvPr>
-        </p:nvSpPr>
-        <p:spPr/>
-        <p:txBody>
-          <a:bodyPr/>
-          <a:lstStyle/>
-          <a:p>
-            <a:endParaRPr lang="en-US" dirty="0" smtClean="0"/>
-          </a:p>
-          <a:p>
-            <a:r>
-              <a:rPr lang="en-US" dirty="0" smtClean="0"/>
+          <a:p>
+            <a:r>
+              <a:rPr lang="en-US" dirty="0"/>
               <a:t>Anomaly detection in </a:t>
             </a:r>
             <a:r>
-              <a:rPr lang="en-US" dirty="0" err="1" smtClean="0"/>
+              <a:rPr lang="en-US" dirty="0" err="1"/>
               <a:t>IoT</a:t>
             </a:r>
             <a:r>
-              <a:rPr lang="en-US" dirty="0" smtClean="0"/>
+              <a:rPr lang="en-US" dirty="0"/>
               <a:t> devices– </a:t>
             </a:r>
             <a:r>
-              <a:rPr lang="en-US" dirty="0" err="1" smtClean="0"/>
+              <a:rPr lang="en-US" dirty="0" err="1"/>
               <a:t>Autoencoders</a:t>
             </a:r>
             <a:r>
-              <a:rPr lang="en-US" dirty="0" smtClean="0"/>
+              <a:rPr lang="en-US" dirty="0"/>
               <a:t> and Deep Learning outperform ML</a:t>
             </a:r>
           </a:p>
@@ -3598,64 +3551,63 @@
           <a:lstStyle/>
           <a:p>
             <a:r>
-              <a:rPr lang="en-US" dirty="0" smtClean="0"/>
+              <a:rPr lang="en-US" dirty="0"/>
               <a:t>4. Generative Models</a:t>
             </a:r>
+          </a:p>
+        </p:txBody>
+      </p:sp>
+      <p:sp>
+        <p:nvSpPr>
+          <p:cNvPr id="3" name="Content Placeholder 2"/>
+          <p:cNvSpPr>
+            <a:spLocks noGrp="1"/>
+          </p:cNvSpPr>
+          <p:nvPr>
+            <p:ph idx="1"/>
+          </p:nvPr>
+        </p:nvSpPr>
+        <p:spPr/>
+        <p:txBody>
+          <a:bodyPr/>
+          <a:lstStyle/>
+          <a:p>
+            <a:r>
+              <a:rPr lang="en-US" dirty="0"/>
+              <a:t>Image generation (GANs for </a:t>
+            </a:r>
+            <a:r>
+              <a:rPr lang="en-US" dirty="0" err="1"/>
+              <a:t>deepfake</a:t>
+            </a:r>
+            <a:r>
+              <a:rPr lang="en-US" dirty="0"/>
+              <a:t> generation, art creation) – Requires deep learning (GANs)</a:t>
+            </a:r>
+          </a:p>
+          <a:p>
             <a:endParaRPr lang="en-US" dirty="0"/>
           </a:p>
-        </p:txBody>
-      </p:sp>
-      <p:sp>
-        <p:nvSpPr>
-          <p:cNvPr id="3" name="Content Placeholder 2"/>
-          <p:cNvSpPr>
-            <a:spLocks noGrp="1"/>
-          </p:cNvSpPr>
-          <p:nvPr>
-            <p:ph idx="1"/>
-          </p:nvPr>
-        </p:nvSpPr>
-        <p:spPr/>
-        <p:txBody>
-          <a:bodyPr/>
-          <a:lstStyle/>
-          <a:p>
-            <a:r>
-              <a:rPr lang="en-US" dirty="0" smtClean="0"/>
-              <a:t>Image generation (GANs for </a:t>
-            </a:r>
-            <a:r>
-              <a:rPr lang="en-US" dirty="0" err="1" smtClean="0"/>
-              <a:t>deepfake</a:t>
-            </a:r>
-            <a:r>
-              <a:rPr lang="en-US" dirty="0" smtClean="0"/>
-              <a:t> generation, art creation) – Requires deep learning (GANs)</a:t>
-            </a:r>
-          </a:p>
-          <a:p>
-            <a:endParaRPr lang="en-US" dirty="0" smtClean="0"/>
-          </a:p>
-          <a:p>
-            <a:r>
-              <a:rPr lang="en-US" dirty="0" smtClean="0"/>
+          <a:p>
+            <a:r>
+              <a:rPr lang="en-US" dirty="0"/>
               <a:t>Text generation (</a:t>
             </a:r>
             <a:r>
-              <a:rPr lang="en-US" dirty="0" err="1" smtClean="0"/>
+              <a:rPr lang="en-US" dirty="0" err="1"/>
               <a:t>ChatGPT</a:t>
             </a:r>
             <a:r>
-              <a:rPr lang="en-US" dirty="0" smtClean="0"/>
+              <a:rPr lang="en-US" dirty="0"/>
               <a:t>, Bard) – Uses Transformer-based architectures</a:t>
             </a:r>
           </a:p>
           <a:p>
-            <a:endParaRPr lang="en-US" dirty="0" smtClean="0"/>
-          </a:p>
-          <a:p>
-            <a:r>
-              <a:rPr lang="en-US" dirty="0" smtClean="0"/>
+            <a:endParaRPr lang="en-US" dirty="0"/>
+          </a:p>
+          <a:p>
+            <a:r>
+              <a:rPr lang="en-US" dirty="0"/>
               <a:t>Music composition and style transfer– Uses LSTMs, GANs</a:t>
             </a:r>
           </a:p>
@@ -3713,48 +3665,47 @@
           <a:lstStyle/>
           <a:p>
             <a:r>
-              <a:rPr lang="en-US" dirty="0" smtClean="0"/>
+              <a:rPr lang="en-US" dirty="0"/>
               <a:t>5. Robotics &amp; Control Systems</a:t>
             </a:r>
+          </a:p>
+        </p:txBody>
+      </p:sp>
+      <p:sp>
+        <p:nvSpPr>
+          <p:cNvPr id="3" name="Content Placeholder 2"/>
+          <p:cNvSpPr>
+            <a:spLocks noGrp="1"/>
+          </p:cNvSpPr>
+          <p:nvPr>
+            <p:ph idx="1"/>
+          </p:nvPr>
+        </p:nvSpPr>
+        <p:spPr/>
+        <p:txBody>
+          <a:bodyPr/>
+          <a:lstStyle/>
+          <a:p>
+            <a:r>
+              <a:rPr lang="en-US" dirty="0"/>
+              <a:t>Autonomous vehicles (self-driving cars) – Uses deep RL, CNNs, sensor fusion</a:t>
+            </a:r>
+          </a:p>
+          <a:p>
             <a:endParaRPr lang="en-US" dirty="0"/>
           </a:p>
-        </p:txBody>
-      </p:sp>
-      <p:sp>
-        <p:nvSpPr>
-          <p:cNvPr id="3" name="Content Placeholder 2"/>
-          <p:cNvSpPr>
-            <a:spLocks noGrp="1"/>
-          </p:cNvSpPr>
-          <p:nvPr>
-            <p:ph idx="1"/>
-          </p:nvPr>
-        </p:nvSpPr>
-        <p:spPr/>
-        <p:txBody>
-          <a:bodyPr/>
-          <a:lstStyle/>
-          <a:p>
-            <a:r>
-              <a:rPr lang="en-US" dirty="0" smtClean="0"/>
-              <a:t>Autonomous vehicles (self-driving cars) – Uses deep RL, CNNs, sensor fusion</a:t>
-            </a:r>
-          </a:p>
-          <a:p>
-            <a:endParaRPr lang="en-US" dirty="0" smtClean="0"/>
-          </a:p>
-          <a:p>
-            <a:r>
-              <a:rPr lang="en-US" dirty="0" smtClean="0"/>
+          <a:p>
+            <a:r>
+              <a:rPr lang="en-US" dirty="0"/>
               <a:t>Industrial robots for automation– Uses deep RL</a:t>
             </a:r>
           </a:p>
           <a:p>
-            <a:endParaRPr lang="en-US" dirty="0" smtClean="0"/>
-          </a:p>
-          <a:p>
-            <a:r>
-              <a:rPr lang="en-US" dirty="0" smtClean="0"/>
+            <a:endParaRPr lang="en-US" dirty="0"/>
+          </a:p>
+          <a:p>
+            <a:r>
+              <a:rPr lang="en-US" dirty="0"/>
               <a:t>Drone navigation and control– Uses deep reinforcement learning</a:t>
             </a:r>
           </a:p>
@@ -3812,47 +3763,46 @@
           <a:lstStyle/>
           <a:p>
             <a:r>
-              <a:rPr lang="en-US" dirty="0" smtClean="0"/>
+              <a:rPr lang="en-US" dirty="0"/>
               <a:t>6. Healthcare &amp; Biomedical Applications</a:t>
             </a:r>
+          </a:p>
+        </p:txBody>
+      </p:sp>
+      <p:sp>
+        <p:nvSpPr>
+          <p:cNvPr id="3" name="Content Placeholder 2"/>
+          <p:cNvSpPr>
+            <a:spLocks noGrp="1"/>
+          </p:cNvSpPr>
+          <p:nvPr>
+            <p:ph idx="1"/>
+          </p:nvPr>
+        </p:nvSpPr>
+        <p:spPr/>
+        <p:txBody>
+          <a:bodyPr/>
+          <a:lstStyle/>
+          <a:p>
+            <a:r>
+              <a:rPr lang="en-US" dirty="0"/>
+              <a:t>Disease diagnosis (e.g., detecting cancer from medical scans) – CNN-based models are superior</a:t>
+            </a:r>
+          </a:p>
+          <a:p>
             <a:endParaRPr lang="en-US" dirty="0"/>
           </a:p>
-        </p:txBody>
-      </p:sp>
-      <p:sp>
-        <p:nvSpPr>
-          <p:cNvPr id="3" name="Content Placeholder 2"/>
-          <p:cNvSpPr>
-            <a:spLocks noGrp="1"/>
-          </p:cNvSpPr>
-          <p:nvPr>
-            <p:ph idx="1"/>
-          </p:nvPr>
-        </p:nvSpPr>
-        <p:spPr/>
-        <p:txBody>
-          <a:bodyPr/>
-          <a:lstStyle/>
-          <a:p>
-            <a:r>
-              <a:rPr lang="en-US" dirty="0" smtClean="0"/>
-              <a:t>Disease diagnosis (e.g., detecting cancer from medical scans) – CNN-based models are superior</a:t>
-            </a:r>
-          </a:p>
-          <a:p>
-            <a:endParaRPr lang="en-US" dirty="0" smtClean="0"/>
-          </a:p>
-          <a:p>
-            <a:r>
-              <a:rPr lang="en-US" dirty="0" smtClean="0"/>
+          <a:p>
+            <a:r>
+              <a:rPr lang="en-US" dirty="0"/>
               <a:t>Drug discovery and protein structure prediction – Uses deep learning (</a:t>
             </a:r>
             <a:r>
-              <a:rPr lang="en-US" dirty="0" err="1" smtClean="0"/>
+              <a:rPr lang="en-US" dirty="0" err="1"/>
               <a:t>AlphaFold</a:t>
             </a:r>
             <a:r>
-              <a:rPr lang="en-US" dirty="0" smtClean="0"/>
+              <a:rPr lang="en-US" dirty="0"/>
               <a:t>)</a:t>
             </a:r>
           </a:p>
@@ -3910,63 +3860,62 @@
           <a:lstStyle/>
           <a:p>
             <a:r>
-              <a:rPr lang="en-US" dirty="0" smtClean="0"/>
+              <a:rPr lang="en-US" dirty="0"/>
               <a:t>7. Gaming &amp; Reinforcement Learning</a:t>
             </a:r>
+          </a:p>
+        </p:txBody>
+      </p:sp>
+      <p:sp>
+        <p:nvSpPr>
+          <p:cNvPr id="3" name="Content Placeholder 2"/>
+          <p:cNvSpPr>
+            <a:spLocks noGrp="1"/>
+          </p:cNvSpPr>
+          <p:nvPr>
+            <p:ph idx="1"/>
+          </p:nvPr>
+        </p:nvSpPr>
+        <p:spPr/>
+        <p:txBody>
+          <a:bodyPr/>
+          <a:lstStyle/>
+          <a:p>
+            <a:r>
+              <a:rPr lang="en-US" dirty="0"/>
+              <a:t>AI playing games (e.g., </a:t>
+            </a:r>
+            <a:r>
+              <a:rPr lang="en-US" dirty="0" err="1"/>
+              <a:t>AlphaGo</a:t>
+            </a:r>
+            <a:r>
+              <a:rPr lang="en-US" dirty="0"/>
+              <a:t>, </a:t>
+            </a:r>
+            <a:r>
+              <a:rPr lang="en-US" dirty="0" err="1"/>
+              <a:t>OpenAI</a:t>
+            </a:r>
+            <a:r>
+              <a:rPr lang="en-US" dirty="0"/>
+              <a:t> Five for </a:t>
+            </a:r>
+            <a:r>
+              <a:rPr lang="en-US" dirty="0" err="1"/>
+              <a:t>Dota</a:t>
+            </a:r>
+            <a:r>
+              <a:rPr lang="en-US" dirty="0"/>
+              <a:t> 2) – Uses Deep RL</a:t>
+            </a:r>
+          </a:p>
+          <a:p>
             <a:endParaRPr lang="en-US" dirty="0"/>
           </a:p>
-        </p:txBody>
-      </p:sp>
-      <p:sp>
-        <p:nvSpPr>
-          <p:cNvPr id="3" name="Content Placeholder 2"/>
-          <p:cNvSpPr>
-            <a:spLocks noGrp="1"/>
-          </p:cNvSpPr>
-          <p:nvPr>
-            <p:ph idx="1"/>
-          </p:nvPr>
-        </p:nvSpPr>
-        <p:spPr/>
-        <p:txBody>
-          <a:bodyPr/>
-          <a:lstStyle/>
-          <a:p>
-            <a:r>
-              <a:rPr lang="en-US" dirty="0" smtClean="0"/>
-              <a:t>AI playing games (e.g., </a:t>
-            </a:r>
-            <a:r>
-              <a:rPr lang="en-US" dirty="0" err="1" smtClean="0"/>
-              <a:t>AlphaGo</a:t>
-            </a:r>
-            <a:r>
-              <a:rPr lang="en-US" dirty="0" smtClean="0"/>
-              <a:t>, </a:t>
-            </a:r>
-            <a:r>
-              <a:rPr lang="en-US" dirty="0" err="1" smtClean="0"/>
-              <a:t>OpenAI</a:t>
-            </a:r>
-            <a:r>
-              <a:rPr lang="en-US" dirty="0" smtClean="0"/>
-              <a:t> Five for </a:t>
-            </a:r>
-            <a:r>
-              <a:rPr lang="en-US" dirty="0" err="1" smtClean="0"/>
-              <a:t>Dota</a:t>
-            </a:r>
-            <a:r>
-              <a:rPr lang="en-US" dirty="0" smtClean="0"/>
-              <a:t> 2) – Uses Deep RL</a:t>
-            </a:r>
-          </a:p>
-          <a:p>
-            <a:endParaRPr lang="en-US" dirty="0" smtClean="0"/>
-          </a:p>
-          <a:p>
-            <a:r>
-              <a:rPr lang="en-US" dirty="0" smtClean="0"/>
+          <a:p>
+            <a:r>
+              <a:rPr lang="en-US" dirty="0"/>
               <a:t>Real-time strategy and decision-making- Uses Deep RL</a:t>
             </a:r>
           </a:p>
@@ -3974,11 +3923,11 @@
             <a:pPr marL="0" indent="0">
               <a:buNone/>
             </a:pPr>
-            <a:endParaRPr lang="en-US" dirty="0" smtClean="0"/>
-          </a:p>
-          <a:p>
-            <a:r>
-              <a:rPr lang="en-US" dirty="0" smtClean="0"/>
+            <a:endParaRPr lang="en-US" dirty="0"/>
+          </a:p>
+          <a:p>
+            <a:r>
+              <a:rPr lang="en-US" dirty="0"/>
               <a:t>Adaptive learning in video games Uses Deep RL</a:t>
             </a:r>
           </a:p>
